--- a/data-eng/decks/w4d1s0.pptx
+++ b/data-eng/decks/w4d1s0.pptx
@@ -5738,7 +5738,7 @@
                 <a:ea typeface="Pretendard"/>
                 <a:cs typeface="Pretendard"/>
               </a:rPr>
-              <a:t>1 Docker 켜짐</a:t>
+              <a:t>1. Docker 켜짐</a:t>
             </a:r>
           </a:p>
         </p:txBody>
@@ -5902,7 +5902,7 @@
                 <a:ea typeface="Pretendard"/>
                 <a:cs typeface="Pretendard"/>
               </a:rPr>
-              <a:t>2 9000·9001</a:t>
+              <a:t>2. 9000·9001</a:t>
             </a:r>
           </a:p>
         </p:txBody>
@@ -6066,7 +6066,7 @@
                 <a:ea typeface="Pretendard"/>
                 <a:cs typeface="Pretendard"/>
               </a:rPr>
-              <a:t>3 이미지 둘</a:t>
+              <a:t>3. 이미지 둘</a:t>
             </a:r>
           </a:p>
         </p:txBody>
@@ -6230,7 +6230,7 @@
                 <a:ea typeface="Pretendard"/>
                 <a:cs typeface="Pretendard"/>
               </a:rPr>
-              <a:t>4 오늘 만들 것</a:t>
+              <a:t>4. 오늘 만들 것</a:t>
             </a:r>
           </a:p>
         </p:txBody>
@@ -6394,7 +6394,7 @@
                 <a:ea typeface="Pretendard"/>
                 <a:cs typeface="Pretendard"/>
               </a:rPr>
-              <a:t>5 환경 재설정</a:t>
+              <a:t>5. 환경 재설정</a:t>
             </a:r>
           </a:p>
         </p:txBody>
